--- a/P11_Categorisez_automatiquement_des_questions_aymeric_bailleul/livrables/ABAI_P11_02_presentation_20260216.pptx
+++ b/P11_Categorisez_automatiquement_des_questions_aymeric_bailleul/livrables/ABAI_P11_02_presentation_20260216.pptx
@@ -211,7 +211,7 @@
           <a:p>
             <a:fld id="{FC1C4A0D-7723-4A92-ABBB-96643D195969}" type="datetimeFigureOut">
               <a:rPr lang="fr-FR" smtClean="0"/>
-              <a:t>25/02/2026</a:t>
+              <a:t>26/02/2026</a:t>
             </a:fld>
             <a:endParaRPr lang="fr-FR"/>
           </a:p>
@@ -950,6 +950,295 @@
           <a:bodyPr/>
           <a:lstStyle/>
           <a:p>
+            <a:pPr marL="0" marR="0" lvl="0" indent="0" algn="l" defTabSz="914400" rtl="0" eaLnBrk="1" fontAlgn="auto" latinLnBrk="0" hangingPunct="1">
+              <a:lnSpc>
+                <a:spcPct val="100000"/>
+              </a:lnSpc>
+              <a:spcBef>
+                <a:spcPts val="0"/>
+              </a:spcBef>
+              <a:spcAft>
+                <a:spcPts val="0"/>
+              </a:spcAft>
+              <a:buClrTx/>
+              <a:buSzTx/>
+              <a:buFontTx/>
+              <a:buNone/>
+              <a:tabLst/>
+              <a:defRPr/>
+            </a:pPr>
+            <a:r>
+              <a:rPr lang="fr-FR" sz="1200" b="0" kern="1200" dirty="0" err="1">
+                <a:solidFill>
+                  <a:schemeClr val="tx1"/>
+                </a:solidFill>
+                <a:effectLst/>
+                <a:latin typeface="+mn-lt"/>
+                <a:ea typeface="+mn-ea"/>
+                <a:cs typeface="+mn-cs"/>
+              </a:rPr>
+              <a:t>Faithfulness</a:t>
+            </a:r>
+            <a:r>
+              <a:rPr lang="fr-FR" sz="1200" b="0" kern="1200" dirty="0">
+                <a:solidFill>
+                  <a:schemeClr val="tx1"/>
+                </a:solidFill>
+                <a:effectLst/>
+                <a:latin typeface="+mn-lt"/>
+                <a:ea typeface="+mn-ea"/>
+                <a:cs typeface="+mn-cs"/>
+              </a:rPr>
+              <a:t> = Génération : fidèle au contexte ?</a:t>
+            </a:r>
+          </a:p>
+          <a:p>
+            <a:r>
+              <a:rPr lang="fr-FR" sz="1200" b="0" kern="1200" dirty="0" err="1">
+                <a:solidFill>
+                  <a:schemeClr val="tx1"/>
+                </a:solidFill>
+                <a:effectLst/>
+                <a:latin typeface="+mn-lt"/>
+                <a:ea typeface="+mn-ea"/>
+                <a:cs typeface="+mn-cs"/>
+              </a:rPr>
+              <a:t>answer_relevancy</a:t>
+            </a:r>
+            <a:r>
+              <a:rPr lang="fr-FR" sz="1200" b="0" kern="1200" dirty="0">
+                <a:solidFill>
+                  <a:schemeClr val="tx1"/>
+                </a:solidFill>
+                <a:effectLst/>
+                <a:latin typeface="+mn-lt"/>
+                <a:ea typeface="+mn-ea"/>
+                <a:cs typeface="+mn-cs"/>
+              </a:rPr>
+              <a:t> = Génération : réponse pertinente à la question ?</a:t>
+            </a:r>
+          </a:p>
+          <a:p>
+            <a:r>
+              <a:rPr lang="fr-FR" sz="1200" b="0" kern="1200" dirty="0" err="1">
+                <a:solidFill>
+                  <a:schemeClr val="tx1"/>
+                </a:solidFill>
+                <a:effectLst/>
+                <a:latin typeface="+mn-lt"/>
+                <a:ea typeface="+mn-ea"/>
+                <a:cs typeface="+mn-cs"/>
+              </a:rPr>
+              <a:t>context_precision</a:t>
+            </a:r>
+            <a:r>
+              <a:rPr lang="fr-FR" sz="1200" b="0" kern="1200" dirty="0">
+                <a:solidFill>
+                  <a:schemeClr val="tx1"/>
+                </a:solidFill>
+                <a:effectLst/>
+                <a:latin typeface="+mn-lt"/>
+                <a:ea typeface="+mn-ea"/>
+                <a:cs typeface="+mn-cs"/>
+              </a:rPr>
+              <a:t> = Récupération : contexte précis (peu de bruit) ?</a:t>
+            </a:r>
+          </a:p>
+          <a:p>
+            <a:r>
+              <a:rPr lang="fr-FR" sz="1200" b="0" kern="1200" dirty="0" err="1">
+                <a:solidFill>
+                  <a:schemeClr val="tx1"/>
+                </a:solidFill>
+                <a:effectLst/>
+                <a:latin typeface="+mn-lt"/>
+                <a:ea typeface="+mn-ea"/>
+                <a:cs typeface="+mn-cs"/>
+              </a:rPr>
+              <a:t>context_recall</a:t>
+            </a:r>
+            <a:r>
+              <a:rPr lang="fr-FR" sz="1200" b="0" kern="1200" dirty="0">
+                <a:solidFill>
+                  <a:schemeClr val="tx1"/>
+                </a:solidFill>
+                <a:effectLst/>
+                <a:latin typeface="+mn-lt"/>
+                <a:ea typeface="+mn-ea"/>
+                <a:cs typeface="+mn-cs"/>
+              </a:rPr>
+              <a:t> = Récupération : infos clés récupérées (nécessite </a:t>
+            </a:r>
+            <a:r>
+              <a:rPr lang="fr-FR" sz="1200" b="0" kern="1200" dirty="0" err="1">
+                <a:solidFill>
+                  <a:schemeClr val="tx1"/>
+                </a:solidFill>
+                <a:effectLst/>
+                <a:latin typeface="+mn-lt"/>
+                <a:ea typeface="+mn-ea"/>
+                <a:cs typeface="+mn-cs"/>
+              </a:rPr>
+              <a:t>ground_truth</a:t>
+            </a:r>
+            <a:r>
+              <a:rPr lang="fr-FR" sz="1200" b="0" kern="1200" dirty="0">
+                <a:solidFill>
+                  <a:schemeClr val="tx1"/>
+                </a:solidFill>
+                <a:effectLst/>
+                <a:latin typeface="+mn-lt"/>
+                <a:ea typeface="+mn-ea"/>
+                <a:cs typeface="+mn-cs"/>
+              </a:rPr>
+              <a:t>) ?</a:t>
+            </a:r>
+          </a:p>
+          <a:p>
+            <a:pPr algn="l"/>
+            <a:endParaRPr lang="fr-FR" sz="1200" b="0" dirty="0">
+              <a:solidFill>
+                <a:schemeClr val="bg1"/>
+              </a:solidFill>
+            </a:endParaRPr>
+          </a:p>
+          <a:p>
+            <a:pPr algn="l"/>
+            <a:r>
+              <a:rPr lang="fr-FR" sz="1200" b="0" dirty="0">
+                <a:solidFill>
+                  <a:schemeClr val="bg1"/>
+                </a:solidFill>
+              </a:rPr>
+              <a:t>Point fort : </a:t>
+            </a:r>
+            <a:r>
+              <a:rPr lang="fr-FR" sz="1200" b="0" dirty="0" err="1">
+                <a:solidFill>
+                  <a:schemeClr val="bg1"/>
+                </a:solidFill>
+              </a:rPr>
+              <a:t>answer_relevancy</a:t>
+            </a:r>
+            <a:r>
+              <a:rPr lang="fr-FR" sz="1200" b="0" dirty="0">
+                <a:solidFill>
+                  <a:schemeClr val="bg1"/>
+                </a:solidFill>
+              </a:rPr>
+              <a:t> = 0.910 — le LLM formule des réponses de qualité</a:t>
+            </a:r>
+          </a:p>
+          <a:p>
+            <a:pPr algn="l"/>
+            <a:r>
+              <a:rPr lang="fr-FR" sz="1200" b="0" dirty="0">
+                <a:solidFill>
+                  <a:schemeClr val="bg1"/>
+                </a:solidFill>
+              </a:rPr>
+              <a:t>Point faible : </a:t>
+            </a:r>
+            <a:r>
+              <a:rPr lang="fr-FR" sz="1200" b="0" dirty="0" err="1">
+                <a:solidFill>
+                  <a:schemeClr val="bg1"/>
+                </a:solidFill>
+              </a:rPr>
+              <a:t>context_recall</a:t>
+            </a:r>
+            <a:r>
+              <a:rPr lang="fr-FR" sz="1200" b="0" dirty="0">
+                <a:solidFill>
+                  <a:schemeClr val="bg1"/>
+                </a:solidFill>
+              </a:rPr>
+              <a:t> = 0.583 — on ne récupère pas toujours tous les passages utiles avec 10 blocs</a:t>
+            </a:r>
+          </a:p>
+          <a:p>
+            <a:pPr algn="l"/>
+            <a:endParaRPr lang="fr-FR" sz="1200" b="0" dirty="0">
+              <a:solidFill>
+                <a:schemeClr val="bg1"/>
+              </a:solidFill>
+            </a:endParaRPr>
+          </a:p>
+          <a:p>
+            <a:r>
+              <a:rPr lang="fr-FR" sz="1200" b="1" kern="1200" dirty="0">
+                <a:solidFill>
+                  <a:schemeClr val="tx1"/>
+                </a:solidFill>
+                <a:effectLst/>
+                <a:latin typeface="+mn-lt"/>
+                <a:ea typeface="+mn-ea"/>
+                <a:cs typeface="+mn-cs"/>
+              </a:rPr>
+              <a:t>Le problème de l'évaluation subjective : </a:t>
+            </a:r>
+            <a:r>
+              <a:rPr lang="fr-FR" sz="1200" b="0" kern="1200" dirty="0">
+                <a:solidFill>
+                  <a:schemeClr val="tx1"/>
+                </a:solidFill>
+                <a:effectLst/>
+                <a:latin typeface="+mn-lt"/>
+                <a:ea typeface="+mn-ea"/>
+                <a:cs typeface="+mn-cs"/>
+              </a:rPr>
+              <a:t>Dire "les réponses ont l'air bonnes" ne suffit pas. Il faut des indicateurs objectifs, reproductibles, qui séparent les deux composantes du système : le </a:t>
+            </a:r>
+            <a:r>
+              <a:rPr lang="fr-FR" sz="1200" b="1" kern="1200" dirty="0">
+                <a:solidFill>
+                  <a:schemeClr val="tx1"/>
+                </a:solidFill>
+                <a:effectLst/>
+                <a:latin typeface="+mn-lt"/>
+                <a:ea typeface="+mn-ea"/>
+                <a:cs typeface="+mn-cs"/>
+              </a:rPr>
+              <a:t>**retriever**</a:t>
+            </a:r>
+            <a:r>
+              <a:rPr lang="fr-FR" sz="1200" b="0" kern="1200" dirty="0">
+                <a:solidFill>
+                  <a:schemeClr val="tx1"/>
+                </a:solidFill>
+                <a:effectLst/>
+                <a:latin typeface="+mn-lt"/>
+                <a:ea typeface="+mn-ea"/>
+                <a:cs typeface="+mn-cs"/>
+              </a:rPr>
+              <a:t> (a-t-il trouvé les bons passages ?) et le </a:t>
+            </a:r>
+            <a:r>
+              <a:rPr lang="fr-FR" sz="1200" b="1" kern="1200" dirty="0">
+                <a:solidFill>
+                  <a:schemeClr val="tx1"/>
+                </a:solidFill>
+                <a:effectLst/>
+                <a:latin typeface="+mn-lt"/>
+                <a:ea typeface="+mn-ea"/>
+                <a:cs typeface="+mn-cs"/>
+              </a:rPr>
+              <a:t>**LLM**</a:t>
+            </a:r>
+            <a:r>
+              <a:rPr lang="fr-FR" sz="1200" b="0" kern="1200" dirty="0">
+                <a:solidFill>
+                  <a:schemeClr val="tx1"/>
+                </a:solidFill>
+                <a:effectLst/>
+                <a:latin typeface="+mn-lt"/>
+                <a:ea typeface="+mn-ea"/>
+                <a:cs typeface="+mn-cs"/>
+              </a:rPr>
+              <a:t> (a-t-il bien répondu avec ces passages ?).</a:t>
+            </a:r>
+          </a:p>
+          <a:p>
             <a:pPr algn="l"/>
             <a:endParaRPr lang="fr-FR" sz="1200" b="0" kern="1200" dirty="0">
               <a:solidFill>
@@ -1180,139 +1469,15 @@
           <a:lstStyle/>
           <a:p>
             <a:pPr algn="l"/>
-            <a:r>
-              <a:rPr lang="fr-FR" sz="1200" b="0" dirty="0">
-                <a:solidFill>
-                  <a:schemeClr val="bg1"/>
-                </a:solidFill>
-              </a:rPr>
-              <a:t>Point fort : </a:t>
-            </a:r>
-            <a:r>
-              <a:rPr lang="fr-FR" sz="1200" b="0" dirty="0" err="1">
-                <a:solidFill>
-                  <a:schemeClr val="bg1"/>
-                </a:solidFill>
-              </a:rPr>
-              <a:t>answer_relevancy</a:t>
-            </a:r>
-            <a:r>
-              <a:rPr lang="fr-FR" sz="1200" b="0" dirty="0">
-                <a:solidFill>
-                  <a:schemeClr val="bg1"/>
-                </a:solidFill>
-              </a:rPr>
-              <a:t> = 0.910 — le LLM formule des réponses de qualité</a:t>
-            </a:r>
-          </a:p>
-          <a:p>
-            <a:pPr algn="l"/>
-            <a:r>
-              <a:rPr lang="fr-FR" sz="1200" b="0" dirty="0">
-                <a:solidFill>
-                  <a:schemeClr val="bg1"/>
-                </a:solidFill>
-              </a:rPr>
-              <a:t>Point faible : </a:t>
-            </a:r>
-            <a:r>
-              <a:rPr lang="fr-FR" sz="1200" b="0" dirty="0" err="1">
-                <a:solidFill>
-                  <a:schemeClr val="bg1"/>
-                </a:solidFill>
-              </a:rPr>
-              <a:t>context_recall</a:t>
-            </a:r>
-            <a:r>
-              <a:rPr lang="fr-FR" sz="1200" b="0" dirty="0">
-                <a:solidFill>
-                  <a:schemeClr val="bg1"/>
-                </a:solidFill>
-              </a:rPr>
-              <a:t> = 0.583 — on ne récupère pas toujours tous les passages utiles avec 10 blocs</a:t>
-            </a:r>
-          </a:p>
-          <a:p>
-            <a:pPr algn="l"/>
-            <a:endParaRPr lang="fr-FR" sz="1200" b="0" dirty="0">
+            <a:endParaRPr lang="fr-FR" sz="1200" b="0" kern="1200" dirty="0">
               <a:solidFill>
-                <a:schemeClr val="bg1"/>
+                <a:schemeClr val="tx1"/>
               </a:solidFill>
+              <a:effectLst/>
+              <a:latin typeface="+mn-lt"/>
+              <a:ea typeface="+mn-ea"/>
+              <a:cs typeface="+mn-cs"/>
             </a:endParaRPr>
-          </a:p>
-          <a:p>
-            <a:r>
-              <a:rPr lang="fr-FR" sz="1200" b="1" kern="1200" dirty="0">
-                <a:solidFill>
-                  <a:schemeClr val="tx1"/>
-                </a:solidFill>
-                <a:effectLst/>
-                <a:latin typeface="+mn-lt"/>
-                <a:ea typeface="+mn-ea"/>
-                <a:cs typeface="+mn-cs"/>
-              </a:rPr>
-              <a:t>Le problème de l'évaluation subjective : </a:t>
-            </a:r>
-            <a:r>
-              <a:rPr lang="fr-FR" sz="1200" b="0" kern="1200" dirty="0">
-                <a:solidFill>
-                  <a:schemeClr val="tx1"/>
-                </a:solidFill>
-                <a:effectLst/>
-                <a:latin typeface="+mn-lt"/>
-                <a:ea typeface="+mn-ea"/>
-                <a:cs typeface="+mn-cs"/>
-              </a:rPr>
-              <a:t>Dire "les réponses ont l'air bonnes" ne suffit pas. Il faut des indicateurs objectifs, reproductibles, qui séparent les deux composantes du système : le </a:t>
-            </a:r>
-            <a:r>
-              <a:rPr lang="fr-FR" sz="1200" b="1" kern="1200" dirty="0">
-                <a:solidFill>
-                  <a:schemeClr val="tx1"/>
-                </a:solidFill>
-                <a:effectLst/>
-                <a:latin typeface="+mn-lt"/>
-                <a:ea typeface="+mn-ea"/>
-                <a:cs typeface="+mn-cs"/>
-              </a:rPr>
-              <a:t>**retriever**</a:t>
-            </a:r>
-            <a:r>
-              <a:rPr lang="fr-FR" sz="1200" b="0" kern="1200" dirty="0">
-                <a:solidFill>
-                  <a:schemeClr val="tx1"/>
-                </a:solidFill>
-                <a:effectLst/>
-                <a:latin typeface="+mn-lt"/>
-                <a:ea typeface="+mn-ea"/>
-                <a:cs typeface="+mn-cs"/>
-              </a:rPr>
-              <a:t> (a-t-il trouvé les bons passages ?) et le </a:t>
-            </a:r>
-            <a:r>
-              <a:rPr lang="fr-FR" sz="1200" b="1" kern="1200" dirty="0">
-                <a:solidFill>
-                  <a:schemeClr val="tx1"/>
-                </a:solidFill>
-                <a:effectLst/>
-                <a:latin typeface="+mn-lt"/>
-                <a:ea typeface="+mn-ea"/>
-                <a:cs typeface="+mn-cs"/>
-              </a:rPr>
-              <a:t>**LLM**</a:t>
-            </a:r>
-            <a:r>
-              <a:rPr lang="fr-FR" sz="1200" b="0" kern="1200" dirty="0">
-                <a:solidFill>
-                  <a:schemeClr val="tx1"/>
-                </a:solidFill>
-                <a:effectLst/>
-                <a:latin typeface="+mn-lt"/>
-                <a:ea typeface="+mn-ea"/>
-                <a:cs typeface="+mn-cs"/>
-              </a:rPr>
-              <a:t> (a-t-il bien répondu avec ces passages ?).</a:t>
-            </a:r>
           </a:p>
         </p:txBody>
       </p:sp>
@@ -2750,30 +2915,6 @@
               <a:tabLst/>
               <a:defRPr/>
             </a:pPr>
-            <a:endParaRPr lang="fr-FR" sz="1700" b="0" dirty="0">
-              <a:solidFill>
-                <a:srgbClr val="4CAF50"/>
-              </a:solidFill>
-            </a:endParaRPr>
-          </a:p>
-          <a:p>
-            <a:pPr marL="0" marR="0" lvl="0" indent="0" algn="l" defTabSz="914400" rtl="0" eaLnBrk="1" fontAlgn="auto" latinLnBrk="0" hangingPunct="1">
-              <a:lnSpc>
-                <a:spcPct val="100000"/>
-              </a:lnSpc>
-              <a:spcBef>
-                <a:spcPts val="0"/>
-              </a:spcBef>
-              <a:spcAft>
-                <a:spcPts val="0"/>
-              </a:spcAft>
-              <a:buClrTx/>
-              <a:buSzTx/>
-              <a:buFontTx/>
-              <a:buNone/>
-              <a:tabLst/>
-              <a:defRPr/>
-            </a:pPr>
             <a:r>
               <a:rPr lang="fr-FR" sz="1200" b="1" kern="1200" dirty="0">
                 <a:solidFill>
@@ -3686,7 +3827,7 @@
           <a:p>
             <a:fld id="{F60878AB-3368-4025-A10C-3112E0B9CFA3}" type="datetimeFigureOut">
               <a:rPr lang="fr-FR" smtClean="0"/>
-              <a:t>25/02/2026</a:t>
+              <a:t>26/02/2026</a:t>
             </a:fld>
             <a:endParaRPr lang="fr-FR"/>
           </a:p>
@@ -3884,7 +4025,7 @@
           <a:p>
             <a:fld id="{F60878AB-3368-4025-A10C-3112E0B9CFA3}" type="datetimeFigureOut">
               <a:rPr lang="fr-FR" smtClean="0"/>
-              <a:t>25/02/2026</a:t>
+              <a:t>26/02/2026</a:t>
             </a:fld>
             <a:endParaRPr lang="fr-FR"/>
           </a:p>
@@ -4092,7 +4233,7 @@
           <a:p>
             <a:fld id="{F60878AB-3368-4025-A10C-3112E0B9CFA3}" type="datetimeFigureOut">
               <a:rPr lang="fr-FR" smtClean="0"/>
-              <a:t>25/02/2026</a:t>
+              <a:t>26/02/2026</a:t>
             </a:fld>
             <a:endParaRPr lang="fr-FR"/>
           </a:p>
@@ -4290,7 +4431,7 @@
           <a:p>
             <a:fld id="{F60878AB-3368-4025-A10C-3112E0B9CFA3}" type="datetimeFigureOut">
               <a:rPr lang="fr-FR" smtClean="0"/>
-              <a:t>25/02/2026</a:t>
+              <a:t>26/02/2026</a:t>
             </a:fld>
             <a:endParaRPr lang="fr-FR"/>
           </a:p>
@@ -4565,7 +4706,7 @@
           <a:p>
             <a:fld id="{F60878AB-3368-4025-A10C-3112E0B9CFA3}" type="datetimeFigureOut">
               <a:rPr lang="fr-FR" smtClean="0"/>
-              <a:t>25/02/2026</a:t>
+              <a:t>26/02/2026</a:t>
             </a:fld>
             <a:endParaRPr lang="fr-FR"/>
           </a:p>
@@ -4830,7 +4971,7 @@
           <a:p>
             <a:fld id="{F60878AB-3368-4025-A10C-3112E0B9CFA3}" type="datetimeFigureOut">
               <a:rPr lang="fr-FR" smtClean="0"/>
-              <a:t>25/02/2026</a:t>
+              <a:t>26/02/2026</a:t>
             </a:fld>
             <a:endParaRPr lang="fr-FR"/>
           </a:p>
@@ -5242,7 +5383,7 @@
           <a:p>
             <a:fld id="{F60878AB-3368-4025-A10C-3112E0B9CFA3}" type="datetimeFigureOut">
               <a:rPr lang="fr-FR" smtClean="0"/>
-              <a:t>25/02/2026</a:t>
+              <a:t>26/02/2026</a:t>
             </a:fld>
             <a:endParaRPr lang="fr-FR"/>
           </a:p>
@@ -5383,7 +5524,7 @@
           <a:p>
             <a:fld id="{F60878AB-3368-4025-A10C-3112E0B9CFA3}" type="datetimeFigureOut">
               <a:rPr lang="fr-FR" smtClean="0"/>
-              <a:t>25/02/2026</a:t>
+              <a:t>26/02/2026</a:t>
             </a:fld>
             <a:endParaRPr lang="fr-FR"/>
           </a:p>
@@ -5496,7 +5637,7 @@
           <a:p>
             <a:fld id="{F60878AB-3368-4025-A10C-3112E0B9CFA3}" type="datetimeFigureOut">
               <a:rPr lang="fr-FR" smtClean="0"/>
-              <a:t>25/02/2026</a:t>
+              <a:t>26/02/2026</a:t>
             </a:fld>
             <a:endParaRPr lang="fr-FR"/>
           </a:p>
@@ -5807,7 +5948,7 @@
           <a:p>
             <a:fld id="{F60878AB-3368-4025-A10C-3112E0B9CFA3}" type="datetimeFigureOut">
               <a:rPr lang="fr-FR" smtClean="0"/>
-              <a:t>25/02/2026</a:t>
+              <a:t>26/02/2026</a:t>
             </a:fld>
             <a:endParaRPr lang="fr-FR"/>
           </a:p>
@@ -6095,7 +6236,7 @@
           <a:p>
             <a:fld id="{F60878AB-3368-4025-A10C-3112E0B9CFA3}" type="datetimeFigureOut">
               <a:rPr lang="fr-FR" smtClean="0"/>
-              <a:t>25/02/2026</a:t>
+              <a:t>26/02/2026</a:t>
             </a:fld>
             <a:endParaRPr lang="fr-FR"/>
           </a:p>
@@ -6351,7 +6492,7 @@
           <a:p>
             <a:fld id="{F60878AB-3368-4025-A10C-3112E0B9CFA3}" type="datetimeFigureOut">
               <a:rPr lang="fr-FR" smtClean="0"/>
-              <a:t>25/02/2026</a:t>
+              <a:t>26/02/2026</a:t>
             </a:fld>
             <a:endParaRPr lang="fr-FR"/>
           </a:p>
@@ -8727,6 +8868,42 @@
           <a:chExt cx="0" cy="0"/>
         </a:xfrm>
       </p:grpSpPr>
+      <p:pic>
+        <p:nvPicPr>
+          <p:cNvPr id="10" name="Image 9">
+            <a:extLst>
+              <a:ext uri="{FF2B5EF4-FFF2-40B4-BE49-F238E27FC236}">
+                <a16:creationId xmlns:a16="http://schemas.microsoft.com/office/drawing/2014/main" id="{F6C6E7E0-F549-DD69-C2C0-E5AA99D13159}"/>
+              </a:ext>
+            </a:extLst>
+          </p:cNvPr>
+          <p:cNvPicPr>
+            <a:picLocks noChangeAspect="1"/>
+          </p:cNvPicPr>
+          <p:nvPr/>
+        </p:nvPicPr>
+        <p:blipFill>
+          <a:blip r:embed="rId3">
+            <a:extLst>
+              <a:ext uri="{28A0092B-C50C-407E-A947-70E740481C1C}">
+                <a14:useLocalDpi xmlns:a14="http://schemas.microsoft.com/office/drawing/2010/main" val="0"/>
+              </a:ext>
+            </a:extLst>
+          </a:blip>
+          <a:stretch>
+            <a:fillRect/>
+          </a:stretch>
+        </p:blipFill>
+        <p:spPr>
+          <a:xfrm>
+            <a:off x="3374400" y="850589"/>
+            <a:ext cx="5443200" cy="5590314"/>
+          </a:xfrm>
+          <a:prstGeom prst="rect">
+            <a:avLst/>
+          </a:prstGeom>
+        </p:spPr>
+      </p:pic>
       <p:sp>
         <p:nvSpPr>
           <p:cNvPr id="2" name="ZoneTexte 1">
@@ -10066,6 +10243,42 @@
           </a:graphicData>
         </a:graphic>
       </p:graphicFrame>
+      <p:pic>
+        <p:nvPicPr>
+          <p:cNvPr id="8" name="Image 7">
+            <a:extLst>
+              <a:ext uri="{FF2B5EF4-FFF2-40B4-BE49-F238E27FC236}">
+                <a16:creationId xmlns:a16="http://schemas.microsoft.com/office/drawing/2014/main" id="{70BEF6AB-5435-D791-4C6A-7BDD540DA93A}"/>
+              </a:ext>
+            </a:extLst>
+          </p:cNvPr>
+          <p:cNvPicPr>
+            <a:picLocks noChangeAspect="1"/>
+          </p:cNvPicPr>
+          <p:nvPr/>
+        </p:nvPicPr>
+        <p:blipFill>
+          <a:blip r:embed="rId4">
+            <a:extLst>
+              <a:ext uri="{28A0092B-C50C-407E-A947-70E740481C1C}">
+                <a14:useLocalDpi xmlns:a14="http://schemas.microsoft.com/office/drawing/2010/main" val="0"/>
+              </a:ext>
+            </a:extLst>
+          </a:blip>
+          <a:stretch>
+            <a:fillRect/>
+          </a:stretch>
+        </p:blipFill>
+        <p:spPr>
+          <a:xfrm>
+            <a:off x="9784660" y="1"/>
+            <a:ext cx="2407339" cy="800100"/>
+          </a:xfrm>
+          <a:prstGeom prst="rect">
+            <a:avLst/>
+          </a:prstGeom>
+        </p:spPr>
+      </p:pic>
     </p:spTree>
     <p:extLst>
       <p:ext uri="{BB962C8B-B14F-4D97-AF65-F5344CB8AC3E}">
@@ -11229,7 +11442,7 @@
         <p:spPr>
           <a:xfrm>
             <a:off x="142875" y="950595"/>
-            <a:ext cx="11906250" cy="5478423"/>
+            <a:ext cx="11906250" cy="4893647"/>
           </a:xfrm>
           <a:prstGeom prst="rect">
             <a:avLst/>
@@ -11277,7 +11490,7 @@
                   <a:schemeClr val="bg1"/>
                 </a:solidFill>
               </a:rPr>
-              <a:t>Quels concerts ont lieu à Toulouse en ce moment ?</a:t>
+              <a:t>Quels concerts ont lieu à Toulouse en Mars 2026?</a:t>
             </a:r>
           </a:p>
           <a:p>
@@ -11315,7 +11528,7 @@
                   <a:schemeClr val="bg1"/>
                 </a:solidFill>
               </a:rPr>
-              <a:t>. Il indique s'ils sont passés ou à venir.</a:t>
+              <a:t>. </a:t>
             </a:r>
           </a:p>
           <a:p>
@@ -11382,7 +11595,15 @@
                   <a:schemeClr val="bg1"/>
                 </a:solidFill>
               </a:rPr>
-              <a:t>avec noms de salles et dates. Le LLM précise "adapté aux enfants" ou "tout public".</a:t>
+              <a:t>avec noms de salles et dates</a:t>
+            </a:r>
+            <a:r>
+              <a:rPr lang="fr-FR">
+                <a:solidFill>
+                  <a:schemeClr val="bg1"/>
+                </a:solidFill>
+              </a:rPr>
+              <a:t>. </a:t>
             </a:r>
           </a:p>
           <a:p>
@@ -11500,7 +11721,7 @@
                   <a:schemeClr val="bg1"/>
                 </a:solidFill>
               </a:rPr>
-              <a:t>Cite le(s) festival(s) trouvés dans la base </a:t>
+              <a:t>Cite-le(s) festival(s) trouvés dans la base </a:t>
             </a:r>
             <a:r>
               <a:rPr lang="fr-FR" i="1" dirty="0">
@@ -11904,7 +12125,7 @@
         <p:spPr>
           <a:xfrm>
             <a:off x="142875" y="950595"/>
-            <a:ext cx="11772034" cy="3308598"/>
+            <a:ext cx="11772034" cy="3293209"/>
           </a:xfrm>
           <a:prstGeom prst="rect">
             <a:avLst/>
@@ -11927,7 +12148,7 @@
             </a:r>
           </a:p>
           <a:p>
-            <a:endParaRPr lang="fr-FR" dirty="0"/>
+            <a:endParaRPr lang="fr-FR" sz="1000" dirty="0"/>
           </a:p>
           <a:p>
             <a:pPr marL="449263"/>
@@ -11957,8 +12178,8 @@
           </a:p>
           <a:p>
             <a:pPr marL="742950" lvl="1" indent="-285750">
-              <a:buFontTx/>
-              <a:buChar char="-"/>
+              <a:buFont typeface="Wingdings" panose="05000000000000000000" pitchFamily="2" charset="2"/>
+              <a:buChar char="à"/>
             </a:pPr>
             <a:r>
               <a:rPr lang="fr-FR" dirty="0">
@@ -11970,9 +12191,9 @@
             </a:r>
           </a:p>
           <a:p>
-            <a:pPr marL="742950" lvl="1" indent="-285750">
-              <a:buFontTx/>
-              <a:buChar char="-"/>
+            <a:pPr marL="1200150" lvl="2" indent="-285750">
+              <a:buFont typeface="Wingdings" panose="05000000000000000000" pitchFamily="2" charset="2"/>
+              <a:buChar char="à"/>
             </a:pPr>
             <a:r>
               <a:rPr lang="fr-FR" dirty="0">
@@ -11997,7 +12218,7 @@
             </a:r>
           </a:p>
           <a:p>
-            <a:endParaRPr lang="fr-FR" dirty="0">
+            <a:endParaRPr lang="fr-FR" sz="1000" dirty="0">
               <a:solidFill>
                 <a:schemeClr val="bg1"/>
               </a:solidFill>
@@ -12011,7 +12232,7 @@
                   <a:schemeClr val="bg1"/>
                 </a:solidFill>
               </a:rPr>
-              <a:t>Comment Interroger une base d’événements en langage naturel ?</a:t>
+              <a:t>Comment Interroger une base d’événements en langage naturel ? Ou plutôt, comment fournir aux utilisateurs une réponse claire à une question données ?</a:t>
             </a:r>
           </a:p>
         </p:txBody>
@@ -12895,7 +13116,7 @@
                   <a:schemeClr val="bg1"/>
                 </a:solidFill>
               </a:rPr>
-              <a:t>Produire une base technique reproductible b       </a:t>
+              <a:t>Produire une base technique reproductible       </a:t>
             </a:r>
           </a:p>
         </p:txBody>
